--- a/GenAI/wk4-embedding-vectorDB-SemanticSearch/vectorDB-embeddings-SematicSearch-pt2-chunking.pptx
+++ b/GenAI/wk4-embedding-vectorDB-SemanticSearch/vectorDB-embeddings-SematicSearch-pt2-chunking.pptx
@@ -223,7 +223,7 @@
           <a:p>
             <a:fld id="{7BAEECA8-D063-486F-AE31-5020270C1449}" type="datetimeFigureOut">
               <a:rPr lang="en-US" smtClean="0"/>
-              <a:t>3/20/2026</a:t>
+              <a:t>7/21/2026</a:t>
             </a:fld>
             <a:endParaRPr lang="en-US"/>
           </a:p>
@@ -1242,7 +1242,7 @@
       <inkml:brushProperty name="color" value="#FFC114"/>
     </inkml:brush>
   </inkml:definitions>
-  <inkml:trace contextRef="#ctx0" brushRef="#br0">27 125 4860 0 0,'-13'-63'-507'0'0,"7"24"1841"0"0,-1 16-208 0 0,7 49-1365 0 0,1 2 260 0 0,5 70-77 0 0,4-2 1 0 0,36 155 0 0 0,-23-137 70 0 0,-11-52 11 0 0,30 93-1 0 0,-33-105 4011 0 0,-12-55-3797 0 0,-2-8-220 0 0,0 1 0 0 0,1-1 0 0 0,0 0-1 0 0,1 0 1 0 0,1-1 0 0 0,0 1-1 0 0,1-1 1 0 0,0 1 0 0 0,1-1 0 0 0,0 1-1 0 0,1-1 1 0 0,5-20 0 0 0,-5 26-84 0 0,1-1-1 0 0,0 1 1 0 0,0 0 0 0 0,1-1 0 0 0,0 1 0 0 0,1 1 0 0 0,-1-1-1 0 0,2 0 1 0 0,-1 1 0 0 0,1 0 0 0 0,0 0 0 0 0,0 0-1 0 0,1 1 1 0 0,0-1 0 0 0,0 1 0 0 0,1 1 0 0 0,0-1-1 0 0,0 1 1 0 0,0 1 0 0 0,0-1 0 0 0,12-5 0 0 0,-13 9 7 0 0,1-1 1 0 0,-1 1 0 0 0,0 0 0 0 0,0 1 0 0 0,1-1 0 0 0,-1 1 0 0 0,0 0 0 0 0,1 1 0 0 0,-1 0 0 0 0,0 0 0 0 0,1 0 0 0 0,-1 1 0 0 0,0-1 0 0 0,0 1 0 0 0,0 1 0 0 0,0-1 0 0 0,-1 1 0 0 0,1 0 0 0 0,-1 1-1 0 0,0-1 1 0 0,1 1 0 0 0,-2 0 0 0 0,1 1 0 0 0,8 8 0 0 0,-2-2-30 0 0,-1 1-1 0 0,0 1 1 0 0,0 0-1 0 0,-2 0 1 0 0,1 0-1 0 0,-2 2 0 0 0,1-1 1 0 0,8 27-1 0 0,-13-28 58 0 0,2-1-1 0 0,-1 0 0 0 0,1 0 1 0 0,1 0-1 0 0,0 0 0 0 0,1-1 0 0 0,0 0 1 0 0,1-1-1 0 0,10 13 0 0 0,-11-18 35 0 0,-1 1-1 0 0,1-1 0 0 0,-1 0 0 0 0,1 0 0 0 0,1-1 0 0 0,-1 0 1 0 0,1 0-1 0 0,-1-1 0 0 0,1 0 0 0 0,0-1 0 0 0,0 1 1 0 0,0-1-1 0 0,1-1 0 0 0,-1 1 0 0 0,12-1 0 0 0,-9-1 9 0 0,-1 1-1 0 0,1-2 0 0 0,0 0 1 0 0,-1 0-1 0 0,1-1 0 0 0,-1 0 1 0 0,1-1-1 0 0,-1 0 0 0 0,0 0 1 0 0,0-1-1 0 0,0-1 0 0 0,-1 0 1 0 0,0 0-1 0 0,1-1 0 0 0,-2 0 1 0 0,1 0-1 0 0,-1-1 0 0 0,0 0 1 0 0,11-13-1 0 0,-9 7-12 0 0,0 0 1 0 0,-2-1-1 0 0,1 0 0 0 0,-2 0 1 0 0,0 0-1 0 0,-1-1 0 0 0,0 0 1 0 0,-1-1-1 0 0,-1 1 0 0 0,0-1 1 0 0,-1 0-1 0 0,1-19 0 0 0,-3 29 10 0 0,0-3 26 0 0,-1-1-1 0 0,1 0 0 0 0,-1 0 0 0 0,-1 0 1 0 0,-1-12-1 0 0,1 21-35 0 0,1 0 0 0 0,-1 0 0 0 0,1 0 0 0 0,-1 0 0 0 0,1 0 0 0 0,-1 0 0 0 0,1 0 0 0 0,-1 0 0 0 0,0 0 0 0 0,1 1 0 0 0,-1-1 0 0 0,0 0 0 0 0,0 0 0 0 0,0 1 0 0 0,0-1-1 0 0,0 1 1 0 0,0-1 0 0 0,0 0 0 0 0,0 1 0 0 0,0 0 0 0 0,0-1 0 0 0,0 1 0 0 0,0 0 0 0 0,0-1 0 0 0,0 1 0 0 0,0 0 0 0 0,0 0 0 0 0,0 0 0 0 0,0 0 0 0 0,0 0 0 0 0,0 0 0 0 0,-1 0 0 0 0,1 0 0 0 0,0 1 0 0 0,-1-1 0 0 0,-22 8-25 0 0,17-5 15 0 0,0 1-1 0 0,1-1 0 0 0,0 2 1 0 0,0-1-1 0 0,0 1 1 0 0,0 0-1 0 0,0 0 0 0 0,1 0 1 0 0,0 1-1 0 0,0 0 0 0 0,1 0 1 0 0,0 0-1 0 0,-7 12 1 0 0,3 0-26 0 0,-1 0 0 0 0,2 0 0 0 0,-9 37 0 0 0,13-44 18 0 0,1 0-1 0 0,1 1 1 0 0,0-1-1 0 0,0 1 1 0 0,1-1-1 0 0,1 1 1 0 0,0-1-1 0 0,0 0 0 0 0,1 1 1 0 0,7 19-1 0 0,-1-8 9 0 0,2 0-1 0 0,0-1 1 0 0,27 41-1 0 0,-36-61 35 0 0,0-1 0 0 0,0 1 0 0 0,0 0 0 0 0,1-1 0 0 0,-1 1 0 0 0,1-1 0 0 0,-1 1 0 0 0,1-1 0 0 0,0 0 0 0 0,-1 0-1 0 0,1 0 1 0 0,0 0 0 0 0,0 0 0 0 0,0 0 0 0 0,-1 0 0 0 0,1-1 0 0 0,0 1 0 0 0,0 0 0 0 0,0-1 0 0 0,0 0 0 0 0,0 1 0 0 0,1-1 0 0 0,-1 0 0 0 0,0 0 0 0 0,0 0 0 0 0,0-1 0 0 0,0 1 0 0 0,0 0 0 0 0,0-1 0 0 0,0 1 0 0 0,0-1 0 0 0,0 0-1 0 0,0 0 1 0 0,-1 0 0 0 0,1 1 0 0 0,0-2 0 0 0,0 1 0 0 0,1-2 0 0 0,11-6 2 0 0,-1-1-1 0 0,-1 0 0 0 0,1-1 1 0 0,10-13-1 0 0,-12 13 0 0 0,37-38-84 0 0,10-13-213 0 0,3 4 0 0 0,2 2 1 0 0,92-63-1 0 0,-150 117 217 0 0,0-1 1 0 0,0 1-1 0 0,0 0 0 0 0,0 0 1 0 0,1 1-1 0 0,-1-1 0 0 0,1 1 1 0 0,-1 0-1 0 0,1 1 0 0 0,-1-1 1 0 0,1 1-1 0 0,-1 0 0 0 0,1 1 1 0 0,-1-1-1 0 0,1 1 0 0 0,-1 0 1 0 0,1 1-1 0 0,-1-1 0 0 0,0 1 1 0 0,0 0-1 0 0,0 0 0 0 0,0 1 0 0 0,11 6 1092 0 0,-21-11-994 0 0,-2 0-33 0 0,1 0 0 0 0,-1 1-1 0 0,1-1 1 0 0,-1 1-1 0 0,0 1 1 0 0,1-1 0 0 0,-1 1-1 0 0,0 0 1 0 0,0 1-1 0 0,1-1 1 0 0,-1 2 0 0 0,0-1-1 0 0,-6 3 1 0 0,1 0-9 0 0,0 1 0 0 0,0 0 0 0 0,1 1 1 0 0,0 0-1 0 0,0 0 0 0 0,-16 15 0 0 0,9-6-11 0 0,1 0 0 0 0,1 2-1 0 0,1 0 1 0 0,0 0 0 0 0,2 2 0 0 0,0 0-1 0 0,-18 35 1 0 0,28-50 2 0 0,1 0-1 0 0,0 1 1 0 0,1 0-1 0 0,-1-1 1 0 0,1 1 0 0 0,-1 0-1 0 0,2 0 1 0 0,-1 0-1 0 0,0 0 1 0 0,1 0-1 0 0,0 0 1 0 0,0 0-1 0 0,0 0 1 0 0,1 0-1 0 0,2 9 1 0 0,-2-11 10 0 0,1 0 1 0 0,0 0-1 0 0,-1 0 0 0 0,1-1 1 0 0,0 1-1 0 0,0 0 0 0 0,1-1 1 0 0,-1 1-1 0 0,1-1 0 0 0,-1 0 1 0 0,1 0-1 0 0,0 0 0 0 0,-1 0 1 0 0,1 0-1 0 0,0 0 0 0 0,0-1 1 0 0,1 0-1 0 0,-1 1 0 0 0,0-1 1 0 0,0 0-1 0 0,1-1 0 0 0,-1 1 1 0 0,5 0-1 0 0,-1-1 6 0 0,1 1 0 0 0,-1-2 0 0 0,0 1 1 0 0,0-1-1 0 0,1 0 0 0 0,-1 0 0 0 0,0-1 0 0 0,0 0 0 0 0,0 0 0 0 0,0-1 1 0 0,-1 0-1 0 0,1 0 0 0 0,-1 0 0 0 0,0-1 0 0 0,1 0 0 0 0,5-5 0 0 0,12-11-36 0 0,-1 0 0 0 0,29-33 0 0 0,-43 43 10 0 0,23-27 17 0 0,35-53-1 0 0,-30 38 638 0 0,-42 65-626 0 0,0 0 0 0 0,1 0-1 0 0,0 0 1 0 0,-3 23 0 0 0,5-27-25 0 0,0 1 1 0 0,1 0-1 0 0,0-1 0 0 0,1 1 1 0 0,0-1-1 0 0,1 1 0 0 0,-1 0 1 0 0,2-1-1 0 0,-1 1 0 0 0,6 14 1 0 0,-6-21 19 0 0,1 0 0 0 0,-1 0 1 0 0,1 0-1 0 0,-1 0 0 0 0,1-1 1 0 0,0 1-1 0 0,0-1 0 0 0,0 1 1 0 0,1-1-1 0 0,-1 0 0 0 0,0 0 1 0 0,1 0-1 0 0,0 0 0 0 0,-1 0 1 0 0,1 0-1 0 0,0-1 0 0 0,0 0 1 0 0,0 1-1 0 0,0-1 0 0 0,0 0 1 0 0,0 0-1 0 0,0-1 0 0 0,0 1 1 0 0,0-1-1 0 0,1 1 0 0 0,-1-1 1 0 0,0 0-1 0 0,0 0 0 0 0,1-1 1 0 0,-1 1-1 0 0,0 0 0 0 0,0-1 1 0 0,0 0-1 0 0,0 0 0 0 0,6-2 1 0 0,8-5-15 0 0,0-1 1 0 0,0 0-1 0 0,-1-1 1 0 0,28-23 0 0 0,-26 19-58 0 0,61-47-187 0 0,-33 25-128 0 0,1 1 0 0 0,71-39 0 0 0,-99 67-50 0 0,-29 18 213 0 0,-35 19 195 0 0,25-21 22 0 0,1 1 0 0 0,0 1-1 0 0,1 0 1 0 0,0 2 0 0 0,-30 25 0 0 0,40-31-5 0 0,0 1-1 0 0,1-1 1 0 0,0 1-1 0 0,0 1 1 0 0,1-1-1 0 0,0 1 1 0 0,0 0-1 0 0,1 0 1 0 0,0 1-1 0 0,0 0 1 0 0,1 0-1 0 0,1 0 1 0 0,-5 18-1 0 0,8-23 7 0 0,0-1 0 0 0,-1 0 0 0 0,2 1 0 0 0,-1-1 0 0 0,0 0 0 0 0,1 1 0 0 0,0-1 0 0 0,0 0 0 0 0,0 0 0 0 0,0 1 0 0 0,1-1 0 0 0,0 0 0 0 0,0-1 0 0 0,0 1 0 0 0,0 0 0 0 0,0 0 0 0 0,1-1 0 0 0,0 1 0 0 0,0-1 0 0 0,0 0 0 0 0,0 0 0 0 0,0 0 0 0 0,0 0 0 0 0,1-1 0 0 0,-1 1 0 0 0,8 2 0 0 0,6 3 108 0 0,0 0 0 0 0,0-2 0 0 0,1 0 0 0 0,32 6 0 0 0,-49-12-87 0 0,3 1 45 0 0,-1-1-1 0 0,1 0 0 0 0,0 0 0 0 0,-1 0 0 0 0,1 0 0 0 0,-1-1 0 0 0,1 1 0 0 0,-1-1 0 0 0,1 0 0 0 0,-1 0 0 0 0,0 0 0 0 0,1-1 0 0 0,-1 1 0 0 0,0-1 0 0 0,0 0 0 0 0,0 0 0 0 0,0 0 0 0 0,0 0 0 0 0,-1 0 0 0 0,1-1 0 0 0,0 1 0 0 0,-1-1 0 0 0,0 0 0 0 0,3-3 0 0 0,3-5 51 0 0,0-1 0 0 0,-1 0-1 0 0,0 0 1 0 0,8-21 0 0 0,-1-6-36 0 0,-1-2 0 0 0,-2 0 0 0 0,-2 0 0 0 0,-2-1 0 0 0,2-48 0 0 0,-10-213 252 0 0,-12 146 380 0 0,10 140-1458 0 0,-4 30 581 0 0,-5 36 91 0 0,7 36-25 0 0,4 0 0 0 0,4 0 0 0 0,19 121 0 0 0,-19-185 103 0 0,0 0-1 0 0,2 0 0 0 0,0 0 0 0 0,1 0 1 0 0,1-1-1 0 0,1 0 0 0 0,1 0 0 0 0,1-1 1 0 0,16 25-1 0 0,-20-36-46 0 0,1 1-1 0 0,0-1 1 0 0,1 0 0 0 0,0-1 0 0 0,0 0-1 0 0,0 0 1 0 0,1-1 0 0 0,0 0 0 0 0,0 0 0 0 0,1-1-1 0 0,-1 0 1 0 0,1-1 0 0 0,0 0 0 0 0,1-1 0 0 0,-1 0-1 0 0,0 0 1 0 0,1-1 0 0 0,0 0 0 0 0,0-1 0 0 0,16 0-1 0 0,39-5-2866 0 0,-31-2 879 0 0</inkml:trace>
+  <inkml:trace contextRef="#ctx0" brushRef="#br0">33 125 4860 0 0,'-13'-63'-507'0'0,"7"24"1841"0"0,-1 16-208 0 0,7 49-1365 0 0,1 2 260 0 0,5 70-77 0 0,4-2 1 0 0,36 155 0 0 0,-23-137 70 0 0,-11-52 11 0 0,30 93-1 0 0,-33-105 4011 0 0,-12-55-3797 0 0,-2-8-220 0 0,0 1 0 0 0,1-1 0 0 0,0 0-1 0 0,1 0 1 0 0,1-1 0 0 0,0 1-1 0 0,1-1 1 0 0,0 1 0 0 0,1-1 0 0 0,0 1-1 0 0,1-1 1 0 0,5-20 0 0 0,-5 26-84 0 0,1-1-1 0 0,0 1 1 0 0,0 0 0 0 0,1-1 0 0 0,0 1 0 0 0,1 1 0 0 0,-1-1-1 0 0,2 0 1 0 0,-1 1 0 0 0,1 0 0 0 0,0 0 0 0 0,0 0-1 0 0,1 1 1 0 0,0-1 0 0 0,0 1 0 0 0,1 1 0 0 0,0-1-1 0 0,0 1 1 0 0,0 1 0 0 0,0-1 0 0 0,12-5 0 0 0,-13 9 7 0 0,1-1 1 0 0,-1 1 0 0 0,0 0 0 0 0,0 1 0 0 0,1-1 0 0 0,-1 1 0 0 0,0 0 0 0 0,1 1 0 0 0,-1 0 0 0 0,0 0 0 0 0,1 0 0 0 0,-1 1 0 0 0,0-1 0 0 0,0 1 0 0 0,0 1 0 0 0,0-1 0 0 0,-1 1 0 0 0,1 0 0 0 0,-1 1-1 0 0,0-1 1 0 0,1 1 0 0 0,-2 0 0 0 0,1 1 0 0 0,8 8 0 0 0,-2-2-30 0 0,-1 1-1 0 0,0 1 1 0 0,0 0-1 0 0,-2 0 1 0 0,1 0-1 0 0,-2 2 0 0 0,1-1 1 0 0,8 27-1 0 0,-13-28 58 0 0,2-1-1 0 0,-1 0 0 0 0,1 0 1 0 0,1 0-1 0 0,0 0 0 0 0,1-1 0 0 0,0 0 1 0 0,1-1-1 0 0,10 13 0 0 0,-11-18 35 0 0,-1 1-1 0 0,1-1 0 0 0,-1 0 0 0 0,1 0 0 0 0,1-1 0 0 0,-1 0 1 0 0,1 0-1 0 0,-1-1 0 0 0,1 0 0 0 0,0-1 0 0 0,0 1 1 0 0,0-1-1 0 0,1-1 0 0 0,-1 1 0 0 0,12-1 0 0 0,-9-1 9 0 0,-1 1-1 0 0,1-2 0 0 0,0 0 1 0 0,-1 0-1 0 0,1-1 0 0 0,-1 0 1 0 0,1-1-1 0 0,-1 0 0 0 0,0 0 1 0 0,0-1-1 0 0,0-1 0 0 0,-1 0 1 0 0,0 0-1 0 0,1-1 0 0 0,-2 0 1 0 0,1 0-1 0 0,-1-1 0 0 0,0 0 1 0 0,11-13-1 0 0,-9 7-12 0 0,0 0 1 0 0,-2-1-1 0 0,1 0 0 0 0,-2 0 1 0 0,0 0-1 0 0,-1-1 0 0 0,0 0 1 0 0,-1-1-1 0 0,-1 1 0 0 0,0-1 1 0 0,-1 0-1 0 0,1-19 0 0 0,-3 29 10 0 0,0-3 26 0 0,-1-1-1 0 0,1 0 0 0 0,-1 0 0 0 0,-1 0 1 0 0,-1-12-1 0 0,1 21-35 0 0,1 0 0 0 0,-1 0 0 0 0,1 0 0 0 0,-1 0 0 0 0,1 0 0 0 0,-1 0 0 0 0,1 0 0 0 0,-1 0 0 0 0,0 0 0 0 0,1 1 0 0 0,-1-1 0 0 0,0 0 0 0 0,0 0 0 0 0,0 1 0 0 0,0-1-1 0 0,0 1 1 0 0,0-1 0 0 0,0 0 0 0 0,0 1 0 0 0,0 0 0 0 0,0-1 0 0 0,0 1 0 0 0,0 0 0 0 0,0-1 0 0 0,0 1 0 0 0,0 0 0 0 0,0 0 0 0 0,0 0 0 0 0,0 0 0 0 0,0 0 0 0 0,0 0 0 0 0,-1 0 0 0 0,1 0 0 0 0,0 1 0 0 0,-1-1 0 0 0,-22 8-25 0 0,17-5 15 0 0,0 1-1 0 0,1-1 0 0 0,0 2 1 0 0,0-1-1 0 0,0 1 1 0 0,0 0-1 0 0,0 0 0 0 0,1 0 1 0 0,0 1-1 0 0,0 0 0 0 0,1 0 1 0 0,0 0-1 0 0,-7 12 1 0 0,3 0-26 0 0,-1 0 0 0 0,2 0 0 0 0,-9 37 0 0 0,13-44 18 0 0,1 0-1 0 0,1 1 1 0 0,0-1-1 0 0,0 1 1 0 0,1-1-1 0 0,1 1 1 0 0,0-1-1 0 0,0 0 0 0 0,1 1 1 0 0,7 19-1 0 0,-1-8 9 0 0,2 0-1 0 0,0-1 1 0 0,27 41-1 0 0,-36-61 35 0 0,0-1 0 0 0,0 1 0 0 0,0 0 0 0 0,1-1 0 0 0,-1 1 0 0 0,1-1 0 0 0,-1 1 0 0 0,1-1 0 0 0,0 0 0 0 0,-1 0-1 0 0,1 0 1 0 0,0 0 0 0 0,0 0 0 0 0,0 0 0 0 0,-1 0 0 0 0,1-1 0 0 0,0 1 0 0 0,0 0 0 0 0,0-1 0 0 0,0 0 0 0 0,0 1 0 0 0,1-1 0 0 0,-1 0 0 0 0,0 0 0 0 0,0 0 0 0 0,0-1 0 0 0,0 1 0 0 0,0 0 0 0 0,0-1 0 0 0,0 1 0 0 0,0-1 0 0 0,0 0-1 0 0,0 0 1 0 0,-1 0 0 0 0,1 1 0 0 0,0-2 0 0 0,0 1 0 0 0,1-2 0 0 0,11-6 2 0 0,-1-1-1 0 0,-1 0 0 0 0,1-1 1 0 0,10-13-1 0 0,-12 13 0 0 0,37-38-84 0 0,10-13-213 0 0,3 4 0 0 0,2 2 1 0 0,92-63-1 0 0,-150 117 217 0 0,0-1 1 0 0,0 1-1 0 0,0 0 0 0 0,0 0 1 0 0,1 1-1 0 0,-1-1 0 0 0,1 1 1 0 0,-1 0-1 0 0,1 1 0 0 0,-1-1 1 0 0,1 1-1 0 0,-1 0 0 0 0,1 1 1 0 0,-1-1-1 0 0,1 1 0 0 0,-1 0 1 0 0,1 1-1 0 0,-1-1 0 0 0,0 1 1 0 0,0 0-1 0 0,0 0 0 0 0,0 1 0 0 0,11 6 1092 0 0,-21-11-994 0 0,-2 0-33 0 0,1 0 0 0 0,-1 1-1 0 0,1-1 1 0 0,-1 1-1 0 0,0 1 1 0 0,1-1 0 0 0,-1 1-1 0 0,0 0 1 0 0,0 1-1 0 0,1-1 1 0 0,-1 2 0 0 0,0-1-1 0 0,-6 3 1 0 0,1 0-9 0 0,0 1 0 0 0,0 0 0 0 0,1 1 1 0 0,0 0-1 0 0,0 0 0 0 0,-16 15 0 0 0,9-6-11 0 0,1 0 0 0 0,1 2-1 0 0,1 0 1 0 0,0 0 0 0 0,2 2 0 0 0,0 0-1 0 0,-18 35 1 0 0,28-50 2 0 0,1 0-1 0 0,0 1 1 0 0,1 0-1 0 0,-1-1 1 0 0,1 1 0 0 0,-1 0-1 0 0,2 0 1 0 0,-1 0-1 0 0,0 0 1 0 0,1 0-1 0 0,0 0 1 0 0,0 0-1 0 0,0 0 1 0 0,1 0-1 0 0,2 9 1 0 0,-2-11 10 0 0,1 0 1 0 0,0 0-1 0 0,-1 0 0 0 0,1-1 1 0 0,0 1-1 0 0,0 0 0 0 0,1-1 1 0 0,-1 1-1 0 0,1-1 0 0 0,-1 0 1 0 0,1 0-1 0 0,0 0 0 0 0,-1 0 1 0 0,1 0-1 0 0,0 0 0 0 0,0-1 1 0 0,1 0-1 0 0,-1 1 0 0 0,0-1 1 0 0,0 0-1 0 0,1-1 0 0 0,-1 1 1 0 0,5 0-1 0 0,-1-1 6 0 0,1 1 0 0 0,-1-2 0 0 0,0 1 1 0 0,0-1-1 0 0,1 0 0 0 0,-1 0 0 0 0,0-1 0 0 0,0 0 0 0 0,0 0 0 0 0,0-1 1 0 0,-1 0-1 0 0,1 0 0 0 0,-1 0 0 0 0,0-1 0 0 0,1 0 0 0 0,5-5 0 0 0,12-11-36 0 0,-1 0 0 0 0,29-33 0 0 0,-43 43 10 0 0,23-27 17 0 0,35-53-1 0 0,-30 38 638 0 0,-42 65-626 0 0,0 0 0 0 0,1 0-1 0 0,0 0 1 0 0,-3 23 0 0 0,5-27-25 0 0,0 1 1 0 0,1 0-1 0 0,0-1 0 0 0,1 1 1 0 0,0-1-1 0 0,1 1 0 0 0,-1 0 1 0 0,2-1-1 0 0,-1 1 0 0 0,6 14 1 0 0,-6-21 19 0 0,1 0 0 0 0,-1 0 1 0 0,1 0-1 0 0,-1 0 0 0 0,1-1 1 0 0,0 1-1 0 0,0-1 0 0 0,0 1 1 0 0,1-1-1 0 0,-1 0 0 0 0,0 0 1 0 0,1 0-1 0 0,0 0 0 0 0,-1 0 1 0 0,1 0-1 0 0,0-1 0 0 0,0 0 1 0 0,0 1-1 0 0,0-1 0 0 0,0 0 1 0 0,0 0-1 0 0,0-1 0 0 0,0 1 1 0 0,0-1-1 0 0,1 1 0 0 0,-1-1 1 0 0,0 0-1 0 0,0 0 0 0 0,1-1 1 0 0,-1 1-1 0 0,0 0 0 0 0,0-1 1 0 0,0 0-1 0 0,0 0 0 0 0,6-2 1 0 0,8-5-15 0 0,0-1 1 0 0,0 0-1 0 0,-1-1 1 0 0,28-23 0 0 0,-26 19-58 0 0,61-47-187 0 0,-33 25-128 0 0,1 1 0 0 0,71-39 0 0 0,-99 67-50 0 0,-29 18 213 0 0,-35 19 195 0 0,25-21 22 0 0,1 1 0 0 0,0 1-1 0 0,1 0 1 0 0,0 2 0 0 0,-30 25 0 0 0,40-31-5 0 0,0 1-1 0 0,1-1 1 0 0,0 1-1 0 0,0 1 1 0 0,1-1-1 0 0,0 1 1 0 0,0 0-1 0 0,1 0 1 0 0,0 1-1 0 0,0 0 1 0 0,1 0-1 0 0,1 0 1 0 0,-5 18-1 0 0,8-23 7 0 0,0-1 0 0 0,-1 0 0 0 0,2 1 0 0 0,-1-1 0 0 0,0 0 0 0 0,1 1 0 0 0,0-1 0 0 0,0 0 0 0 0,0 0 0 0 0,0 1 0 0 0,1-1 0 0 0,0 0 0 0 0,0-1 0 0 0,0 1 0 0 0,0 0 0 0 0,0 0 0 0 0,1-1 0 0 0,0 1 0 0 0,0-1 0 0 0,0 0 0 0 0,0 0 0 0 0,0 0 0 0 0,0 0 0 0 0,1-1 0 0 0,-1 1 0 0 0,8 2 0 0 0,6 3 108 0 0,0 0 0 0 0,0-2 0 0 0,1 0 0 0 0,32 6 0 0 0,-49-12-87 0 0,3 1 45 0 0,-1-1-1 0 0,1 0 0 0 0,0 0 0 0 0,-1 0 0 0 0,1 0 0 0 0,-1-1 0 0 0,1 1 0 0 0,-1-1 0 0 0,1 0 0 0 0,-1 0 0 0 0,0 0 0 0 0,1-1 0 0 0,-1 1 0 0 0,0-1 0 0 0,0 0 0 0 0,0 0 0 0 0,0 0 0 0 0,0 0 0 0 0,-1 0 0 0 0,1-1 0 0 0,0 1 0 0 0,-1-1 0 0 0,0 0 0 0 0,3-3 0 0 0,3-5 51 0 0,0-1 0 0 0,-1 0-1 0 0,0 0 1 0 0,8-21 0 0 0,-1-6-36 0 0,-1-2 0 0 0,-2 0 0 0 0,-2 0 0 0 0,-2-1 0 0 0,2-48 0 0 0,-10-213 252 0 0,-12 146 380 0 0,10 140-1458 0 0,-4 30 581 0 0,-5 36 91 0 0,7 36-25 0 0,4 0 0 0 0,4 0 0 0 0,19 121 0 0 0,-19-185 103 0 0,0 0-1 0 0,2 0 0 0 0,0 0 0 0 0,1 0 1 0 0,1-1-1 0 0,1 0 0 0 0,1 0 0 0 0,1-1 1 0 0,16 25-1 0 0,-20-36-46 0 0,1 1-1 0 0,0-1 1 0 0,1 0 0 0 0,0-1 0 0 0,0 0-1 0 0,0 0 1 0 0,1-1 0 0 0,0 0 0 0 0,0 0 0 0 0,1-1-1 0 0,-1 0 1 0 0,1-1 0 0 0,0 0 0 0 0,1-1 0 0 0,-1 0-1 0 0,0 0 1 0 0,1-1 0 0 0,0 0 0 0 0,0-1 0 0 0,16 0-1 0 0,39-5-2866 0 0,-31-2 879 0 0</inkml:trace>
 </inkml:ink>
 </file>
 
@@ -1274,7 +1274,7 @@
       <inkml:brushProperty name="color" value="#FFC114"/>
     </inkml:brush>
   </inkml:definitions>
-  <inkml:trace contextRef="#ctx0" brushRef="#br0">20 97 5324 0 0,'-19'-25'-184'0'0,"20"21"175"0"0,1 0-1 0 0,0 1 0 0 0,0 0 0 0 0,0-1 0 0 0,0 1 0 0 0,0 0 0 0 0,1 0 0 0 0,0 0 1 0 0,-1 0-1 0 0,1 1 0 0 0,0-1 0 0 0,0 1 0 0 0,1 0 0 0 0,-1 0 0 0 0,0 0 0 0 0,1 0 1 0 0,-1 0-1 0 0,1 1 0 0 0,-1-1 0 0 0,1 1 0 0 0,0 0 0 0 0,5 0 0 0 0,7-4-10 0 0,0 2-1 0 0,0 0 0 0 0,1 1 0 0 0,19-1 0 0 0,-25 3 0 0 0,1 1 0 0 0,-1 0 0 0 0,0 1 0 0 0,0-1 0 0 0,0 2 0 0 0,0 0 0 0 0,-1 0 0 0 0,1 1 0 0 0,14 8 0 0 0,-21-10 17 0 0,0 0-1 0 0,-1 0 1 0 0,1 1-1 0 0,-1 0 1 0 0,1-1-1 0 0,-1 1 1 0 0,0 1-1 0 0,0-1 1 0 0,-1 0-1 0 0,1 1 1 0 0,-1-1-1 0 0,1 1 1 0 0,-1 0-1 0 0,0 0 1 0 0,0 0-1 0 0,-1 0 1 0 0,1 0-1 0 0,-1 0 1 0 0,0 0-1 0 0,0 0 1 0 0,0 1-1 0 0,-1-1 1 0 0,1 0-1 0 0,-1 1 1 0 0,0-1-1 0 0,-1 0 1 0 0,0 7-1 0 0,-4 11-6 0 0,0 0 1 0 0,-2-1-1 0 0,-16 38 0 0 0,14-40-34 0 0,2 1-1 0 0,0-1 0 0 0,1 1 0 0 0,-5 33 0 0 0,10-51 46 0 0,1-1-1 0 0,0 1 1 0 0,0-1-1 0 0,0 1 1 0 0,1 0-1 0 0,-1-1 1 0 0,0 1 0 0 0,1-1-1 0 0,-1 1 1 0 0,1-1-1 0 0,-1 1 1 0 0,1-1-1 0 0,-1 0 1 0 0,1 1-1 0 0,0-1 1 0 0,0 0 0 0 0,0 1-1 0 0,0-1 1 0 0,0 0-1 0 0,0 0 1 0 0,1 1-1 0 0,2 1 6 0 0,-1-1-1 0 0,1 1 0 0 0,-1-1 0 0 0,1 0 0 0 0,0-1 0 0 0,0 1 0 0 0,8 2 0 0 0,4-1 24 0 0,1 0 0 0 0,34 2 0 0 0,327 1-2132 0 0,-329-4 1756 0 0</inkml:trace>
+  <inkml:trace contextRef="#ctx0" brushRef="#br0">26 97 5324 0 0,'-19'-25'-184'0'0,"20"21"175"0"0,1 0-1 0 0,0 1 0 0 0,0 0 0 0 0,0-1 0 0 0,0 1 0 0 0,0 0 0 0 0,1 0 0 0 0,0 0 1 0 0,-1 0-1 0 0,1 1 0 0 0,0-1 0 0 0,0 1 0 0 0,1 0 0 0 0,-1 0 0 0 0,0 0 0 0 0,1 0 1 0 0,-1 0-1 0 0,1 1 0 0 0,-1-1 0 0 0,1 1 0 0 0,0 0 0 0 0,5 0 0 0 0,7-4-10 0 0,0 2-1 0 0,0 0 0 0 0,1 1 0 0 0,19-1 0 0 0,-25 3 0 0 0,1 1 0 0 0,-1 0 0 0 0,0 1 0 0 0,0-1 0 0 0,0 2 0 0 0,0 0 0 0 0,-1 0 0 0 0,1 1 0 0 0,14 8 0 0 0,-21-10 17 0 0,0 0-1 0 0,-1 0 1 0 0,1 1-1 0 0,-1 0 1 0 0,1-1-1 0 0,-1 1 1 0 0,0 1-1 0 0,0-1 1 0 0,-1 0-1 0 0,1 1 1 0 0,-1-1-1 0 0,1 1 1 0 0,-1 0-1 0 0,0 0 1 0 0,0 0-1 0 0,-1 0 1 0 0,1 0-1 0 0,-1 0 1 0 0,0 0-1 0 0,0 0 1 0 0,0 1-1 0 0,-1-1 1 0 0,1 0-1 0 0,-1 1 1 0 0,0-1-1 0 0,-1 0 1 0 0,0 7-1 0 0,-4 11-6 0 0,0 0 1 0 0,-2-1-1 0 0,-16 38 0 0 0,14-40-34 0 0,2 1-1 0 0,0-1 0 0 0,1 1 0 0 0,-5 33 0 0 0,10-51 46 0 0,1-1-1 0 0,0 1 1 0 0,0-1-1 0 0,0 1 1 0 0,1 0-1 0 0,-1-1 1 0 0,0 1 0 0 0,1-1-1 0 0,-1 1 1 0 0,1-1-1 0 0,-1 1 1 0 0,1-1-1 0 0,-1 0 1 0 0,1 1-1 0 0,0-1 1 0 0,0 0 0 0 0,0 1-1 0 0,0-1 1 0 0,0 0-1 0 0,0 0 1 0 0,1 1-1 0 0,2 1 6 0 0,-1-1-1 0 0,1 1 0 0 0,-1-1 0 0 0,1 0 0 0 0,0-1 0 0 0,0 1 0 0 0,8 2 0 0 0,4-1 24 0 0,1 0 0 0 0,34 2 0 0 0,327 1-2132 0 0,-329-4 1756 0 0</inkml:trace>
 </inkml:ink>
 </file>
 
@@ -1680,7 +1680,7 @@
           <a:p>
             <a:fld id="{CB233BD1-3BA8-448D-9D08-7846095EA517}" type="datetimeFigureOut">
               <a:rPr lang="en-US" smtClean="0"/>
-              <a:t>3/20/2026</a:t>
+              <a:t>7/21/2026</a:t>
             </a:fld>
             <a:endParaRPr lang="en-US"/>
           </a:p>
@@ -2094,7 +2094,7 @@
           <a:p>
             <a:fld id="{6383FAE1-13DE-4511-8C1B-C8AFB720664C}" type="datetimeFigureOut">
               <a:rPr lang="en-US" smtClean="0"/>
-              <a:t>3/20/2026</a:t>
+              <a:t>7/21/2026</a:t>
             </a:fld>
             <a:endParaRPr lang="en-US"/>
           </a:p>
@@ -2292,7 +2292,7 @@
           <a:p>
             <a:fld id="{6383FAE1-13DE-4511-8C1B-C8AFB720664C}" type="datetimeFigureOut">
               <a:rPr lang="en-US" smtClean="0"/>
-              <a:t>3/20/2026</a:t>
+              <a:t>7/21/2026</a:t>
             </a:fld>
             <a:endParaRPr lang="en-US"/>
           </a:p>
@@ -2500,7 +2500,7 @@
           <a:p>
             <a:fld id="{6383FAE1-13DE-4511-8C1B-C8AFB720664C}" type="datetimeFigureOut">
               <a:rPr lang="en-US" smtClean="0"/>
-              <a:t>3/20/2026</a:t>
+              <a:t>7/21/2026</a:t>
             </a:fld>
             <a:endParaRPr lang="en-US"/>
           </a:p>
@@ -2698,7 +2698,7 @@
           <a:p>
             <a:fld id="{6383FAE1-13DE-4511-8C1B-C8AFB720664C}" type="datetimeFigureOut">
               <a:rPr lang="en-US" smtClean="0"/>
-              <a:t>3/20/2026</a:t>
+              <a:t>7/21/2026</a:t>
             </a:fld>
             <a:endParaRPr lang="en-US"/>
           </a:p>
@@ -2973,7 +2973,7 @@
           <a:p>
             <a:fld id="{6383FAE1-13DE-4511-8C1B-C8AFB720664C}" type="datetimeFigureOut">
               <a:rPr lang="en-US" smtClean="0"/>
-              <a:t>3/20/2026</a:t>
+              <a:t>7/21/2026</a:t>
             </a:fld>
             <a:endParaRPr lang="en-US"/>
           </a:p>
@@ -3238,7 +3238,7 @@
           <a:p>
             <a:fld id="{6383FAE1-13DE-4511-8C1B-C8AFB720664C}" type="datetimeFigureOut">
               <a:rPr lang="en-US" smtClean="0"/>
-              <a:t>3/20/2026</a:t>
+              <a:t>7/21/2026</a:t>
             </a:fld>
             <a:endParaRPr lang="en-US"/>
           </a:p>
@@ -3650,7 +3650,7 @@
           <a:p>
             <a:fld id="{6383FAE1-13DE-4511-8C1B-C8AFB720664C}" type="datetimeFigureOut">
               <a:rPr lang="en-US" smtClean="0"/>
-              <a:t>3/20/2026</a:t>
+              <a:t>7/21/2026</a:t>
             </a:fld>
             <a:endParaRPr lang="en-US"/>
           </a:p>
@@ -3791,7 +3791,7 @@
           <a:p>
             <a:fld id="{6383FAE1-13DE-4511-8C1B-C8AFB720664C}" type="datetimeFigureOut">
               <a:rPr lang="en-US" smtClean="0"/>
-              <a:t>3/20/2026</a:t>
+              <a:t>7/21/2026</a:t>
             </a:fld>
             <a:endParaRPr lang="en-US"/>
           </a:p>
@@ -3904,7 +3904,7 @@
           <a:p>
             <a:fld id="{6383FAE1-13DE-4511-8C1B-C8AFB720664C}" type="datetimeFigureOut">
               <a:rPr lang="en-US" smtClean="0"/>
-              <a:t>3/20/2026</a:t>
+              <a:t>7/21/2026</a:t>
             </a:fld>
             <a:endParaRPr lang="en-US"/>
           </a:p>
@@ -4215,7 +4215,7 @@
           <a:p>
             <a:fld id="{6383FAE1-13DE-4511-8C1B-C8AFB720664C}" type="datetimeFigureOut">
               <a:rPr lang="en-US" smtClean="0"/>
-              <a:t>3/20/2026</a:t>
+              <a:t>7/21/2026</a:t>
             </a:fld>
             <a:endParaRPr lang="en-US"/>
           </a:p>
@@ -4506,7 +4506,7 @@
           <a:p>
             <a:fld id="{6383FAE1-13DE-4511-8C1B-C8AFB720664C}" type="datetimeFigureOut">
               <a:rPr lang="en-US" smtClean="0"/>
-              <a:t>3/20/2026</a:t>
+              <a:t>7/21/2026</a:t>
             </a:fld>
             <a:endParaRPr lang="en-US"/>
           </a:p>
@@ -4750,7 +4750,7 @@
           <a:p>
             <a:fld id="{6383FAE1-13DE-4511-8C1B-C8AFB720664C}" type="datetimeFigureOut">
               <a:rPr lang="en-US" smtClean="0"/>
-              <a:t>3/20/2026</a:t>
+              <a:t>7/21/2026</a:t>
             </a:fld>
             <a:endParaRPr lang="en-US"/>
           </a:p>
@@ -5760,7 +5760,7 @@
         </p:nvSpPr>
         <p:spPr>
           <a:xfrm>
-            <a:off x="477520" y="80232"/>
+            <a:off x="669544" y="1396968"/>
             <a:ext cx="10292080" cy="2677656"/>
           </a:xfrm>
           <a:prstGeom prst="rect">
@@ -5936,7 +5936,7 @@
         </p:nvSpPr>
         <p:spPr>
           <a:xfrm>
-            <a:off x="477520" y="80232"/>
+            <a:off x="477520" y="158724"/>
             <a:ext cx="10292080" cy="1200329"/>
           </a:xfrm>
           <a:prstGeom prst="rect">
@@ -8465,7 +8465,7 @@
         <p:spPr>
           <a:xfrm>
             <a:off x="356616" y="1327880"/>
-            <a:ext cx="6428232" cy="2554545"/>
+            <a:ext cx="6428232" cy="3354765"/>
           </a:xfrm>
           <a:prstGeom prst="rect">
             <a:avLst/>
@@ -8479,6 +8479,27 @@
           <a:lstStyle/>
           <a:p>
             <a:r>
+              <a:rPr lang="en-US" sz="2400" b="1" dirty="0">
+                <a:solidFill>
+                  <a:schemeClr val="accent6">
+                    <a:lumMod val="60000"/>
+                    <a:lumOff val="40000"/>
+                  </a:schemeClr>
+                </a:solidFill>
+              </a:rPr>
+              <a:t>AI in Healthcare</a:t>
+            </a:r>
+            <a:endParaRPr lang="en-US" sz="2000" b="1" dirty="0">
+              <a:solidFill>
+                <a:schemeClr val="accent6">
+                  <a:lumMod val="60000"/>
+                  <a:lumOff val="40000"/>
+                </a:schemeClr>
+              </a:solidFill>
+            </a:endParaRPr>
+          </a:p>
+          <a:p>
+            <a:r>
               <a:rPr lang="en-US" sz="2000" dirty="0">
                 <a:solidFill>
                   <a:schemeClr val="accent6">
@@ -8487,7 +8508,7 @@
                   </a:schemeClr>
                 </a:solidFill>
               </a:rPr>
-              <a:t>## AI in Healthcare</a:t>
+              <a:t>AI helps doctors diagnose diseases. Dr. are using</a:t>
             </a:r>
           </a:p>
           <a:p>
@@ -8500,7 +8521,7 @@
                   </a:schemeClr>
                 </a:solidFill>
               </a:rPr>
-              <a:t>AI helps doctors diagnose diseases.</a:t>
+              <a:t>AI to treat patients better.</a:t>
             </a:r>
           </a:p>
           <a:p>
@@ -8515,6 +8536,27 @@
           </a:p>
           <a:p>
             <a:r>
+              <a:rPr lang="en-US" sz="2400" b="1" dirty="0">
+                <a:solidFill>
+                  <a:schemeClr val="accent6">
+                    <a:lumMod val="60000"/>
+                    <a:lumOff val="40000"/>
+                  </a:schemeClr>
+                </a:solidFill>
+              </a:rPr>
+              <a:t>AI in Finance</a:t>
+            </a:r>
+            <a:endParaRPr lang="en-US" sz="2000" b="1" dirty="0">
+              <a:solidFill>
+                <a:schemeClr val="accent6">
+                  <a:lumMod val="60000"/>
+                  <a:lumOff val="40000"/>
+                </a:schemeClr>
+              </a:solidFill>
+            </a:endParaRPr>
+          </a:p>
+          <a:p>
+            <a:r>
               <a:rPr lang="en-US" sz="2000" dirty="0">
                 <a:solidFill>
                   <a:schemeClr val="accent6">
@@ -8523,7 +8565,7 @@
                   </a:schemeClr>
                 </a:solidFill>
               </a:rPr>
-              <a:t>## AI in Finance</a:t>
+              <a:t>AI detects fraud and manages risk. Banks like Loxford</a:t>
             </a:r>
           </a:p>
           <a:p>
@@ -8536,7 +8578,7 @@
                   </a:schemeClr>
                 </a:solidFill>
               </a:rPr>
-              <a:t>AI detects fraud and manages risk.</a:t>
+              <a:t>are using ML model to provide better customer service </a:t>
             </a:r>
           </a:p>
           <a:p>
@@ -8551,7 +8593,7 @@
           </a:p>
           <a:p>
             <a:r>
-              <a:rPr lang="en-US" sz="2000" dirty="0">
+              <a:rPr lang="en-US" sz="2400" b="1" dirty="0">
                 <a:solidFill>
                   <a:schemeClr val="accent6">
                     <a:lumMod val="60000"/>
@@ -8559,8 +8601,16 @@
                   </a:schemeClr>
                 </a:solidFill>
               </a:rPr>
-              <a:t>## AI In Education</a:t>
-            </a:r>
+              <a:t>AI In Education</a:t>
+            </a:r>
+            <a:endParaRPr lang="en-US" sz="2000" b="1" dirty="0">
+              <a:solidFill>
+                <a:schemeClr val="accent6">
+                  <a:lumMod val="60000"/>
+                  <a:lumOff val="40000"/>
+                </a:schemeClr>
+              </a:solidFill>
+            </a:endParaRPr>
           </a:p>
           <a:p>
             <a:r>
@@ -8577,8 +8627,8 @@
           </a:p>
         </p:txBody>
       </p:sp>
-      <mc:AlternateContent xmlns:mc="http://schemas.openxmlformats.org/markup-compatibility/2006" xmlns:p14="http://schemas.microsoft.com/office/powerpoint/2010/main">
-        <mc:Choice Requires="p14">
+      <mc:AlternateContent xmlns:mc="http://schemas.openxmlformats.org/markup-compatibility/2006">
+        <mc:Choice xmlns:p14="http://schemas.microsoft.com/office/powerpoint/2010/main" Requires="p14">
           <p:contentPart p14:bwMode="auto" r:id="rId2">
             <p14:nvContentPartPr>
               <p14:cNvPr id="4" name="Ink 3">
@@ -8592,12 +8642,12 @@
               <p14:nvPr/>
             </p14:nvContentPartPr>
             <p14:xfrm>
-              <a:off x="5404824" y="1336896"/>
+              <a:off x="7379928" y="1336896"/>
               <a:ext cx="226440" cy="592920"/>
             </p14:xfrm>
           </p:contentPart>
         </mc:Choice>
-        <mc:Fallback xmlns="">
+        <mc:Fallback>
           <p:pic>
             <p:nvPicPr>
               <p:cNvPr id="4" name="Ink 3">
@@ -8618,7 +8668,7 @@
             </p:blipFill>
             <p:spPr>
               <a:xfrm>
-                <a:off x="5369184" y="1301256"/>
+                <a:off x="7343928" y="1300896"/>
                 <a:ext cx="298080" cy="664560"/>
               </a:xfrm>
               <a:prstGeom prst="rect">
@@ -8642,7 +8692,7 @@
         </p:nvGrpSpPr>
         <p:grpSpPr>
           <a:xfrm>
-            <a:off x="6011424" y="1381536"/>
+            <a:off x="7986528" y="1381536"/>
             <a:ext cx="1233720" cy="344880"/>
             <a:chOff x="6011424" y="1381536"/>
             <a:chExt cx="1233720" cy="344880"/>
@@ -8904,8 +8954,8 @@
           </mc:Fallback>
         </mc:AlternateContent>
       </p:grpSp>
-      <mc:AlternateContent xmlns:mc="http://schemas.openxmlformats.org/markup-compatibility/2006" xmlns:p14="http://schemas.microsoft.com/office/powerpoint/2010/main">
-        <mc:Choice Requires="p14">
+      <mc:AlternateContent xmlns:mc="http://schemas.openxmlformats.org/markup-compatibility/2006">
+        <mc:Choice xmlns:p14="http://schemas.microsoft.com/office/powerpoint/2010/main" Requires="p14">
           <p:contentPart p14:bwMode="auto" r:id="rId14">
             <p14:nvContentPartPr>
               <p14:cNvPr id="12" name="Ink 11">
@@ -8919,12 +8969,12 @@
               <p14:nvPr/>
             </p14:nvContentPartPr>
             <p14:xfrm>
-              <a:off x="5572944" y="2352816"/>
+              <a:off x="7328448" y="2914452"/>
               <a:ext cx="294120" cy="497880"/>
             </p14:xfrm>
           </p:contentPart>
         </mc:Choice>
-        <mc:Fallback xmlns="">
+        <mc:Fallback>
           <p:pic>
             <p:nvPicPr>
               <p:cNvPr id="12" name="Ink 11">
@@ -8945,7 +8995,7 @@
             </p:blipFill>
             <p:spPr>
               <a:xfrm>
-                <a:off x="5536944" y="2317176"/>
+                <a:off x="7292448" y="2878452"/>
                 <a:ext cx="365760" cy="569520"/>
               </a:xfrm>
               <a:prstGeom prst="rect">
@@ -8955,8 +9005,8 @@
           </p:pic>
         </mc:Fallback>
       </mc:AlternateContent>
-      <mc:AlternateContent xmlns:mc="http://schemas.openxmlformats.org/markup-compatibility/2006" xmlns:p14="http://schemas.microsoft.com/office/powerpoint/2010/main">
-        <mc:Choice Requires="p14">
+      <mc:AlternateContent xmlns:mc="http://schemas.openxmlformats.org/markup-compatibility/2006">
+        <mc:Choice xmlns:p14="http://schemas.microsoft.com/office/powerpoint/2010/main" Requires="p14">
           <p:contentPart p14:bwMode="auto" r:id="rId16">
             <p14:nvContentPartPr>
               <p14:cNvPr id="13" name="Ink 12">
@@ -8970,12 +9020,12 @@
               <p14:nvPr/>
             </p14:nvContentPartPr>
             <p14:xfrm>
-              <a:off x="6087744" y="2362536"/>
+              <a:off x="7843248" y="2924172"/>
               <a:ext cx="938880" cy="363960"/>
             </p14:xfrm>
           </p:contentPart>
         </mc:Choice>
-        <mc:Fallback xmlns="">
+        <mc:Fallback>
           <p:pic>
             <p:nvPicPr>
               <p:cNvPr id="13" name="Ink 12">
@@ -8996,8 +9046,8 @@
             </p:blipFill>
             <p:spPr>
               <a:xfrm>
-                <a:off x="6052104" y="2326536"/>
-                <a:ext cx="1010520" cy="435600"/>
+                <a:off x="7807594" y="2888172"/>
+                <a:ext cx="1010547" cy="435600"/>
               </a:xfrm>
               <a:prstGeom prst="rect">
                 <a:avLst/>
@@ -9006,8 +9056,8 @@
           </p:pic>
         </mc:Fallback>
       </mc:AlternateContent>
-      <mc:AlternateContent xmlns:mc="http://schemas.openxmlformats.org/markup-compatibility/2006" xmlns:p14="http://schemas.microsoft.com/office/powerpoint/2010/main">
-        <mc:Choice Requires="p14">
+      <mc:AlternateContent xmlns:mc="http://schemas.openxmlformats.org/markup-compatibility/2006">
+        <mc:Choice xmlns:p14="http://schemas.microsoft.com/office/powerpoint/2010/main" Requires="p14">
           <p:contentPart p14:bwMode="auto" r:id="rId18">
             <p14:nvContentPartPr>
               <p14:cNvPr id="14" name="Ink 13">
@@ -9021,12 +9071,12 @@
               <p14:nvPr/>
             </p14:nvContentPartPr>
             <p14:xfrm>
-              <a:off x="7072704" y="2526336"/>
+              <a:off x="8828208" y="3087972"/>
               <a:ext cx="299520" cy="166680"/>
             </p14:xfrm>
           </p:contentPart>
         </mc:Choice>
-        <mc:Fallback xmlns="">
+        <mc:Fallback>
           <p:pic>
             <p:nvPicPr>
               <p:cNvPr id="14" name="Ink 13">
@@ -9047,8 +9097,8 @@
             </p:blipFill>
             <p:spPr>
               <a:xfrm>
-                <a:off x="7037064" y="2490336"/>
-                <a:ext cx="371160" cy="238320"/>
+                <a:off x="8792525" y="3051972"/>
+                <a:ext cx="371246" cy="238320"/>
               </a:xfrm>
               <a:prstGeom prst="rect">
                 <a:avLst/>
@@ -9057,8 +9107,8 @@
           </p:pic>
         </mc:Fallback>
       </mc:AlternateContent>
-      <mc:AlternateContent xmlns:mc="http://schemas.openxmlformats.org/markup-compatibility/2006" xmlns:p14="http://schemas.microsoft.com/office/powerpoint/2010/main">
-        <mc:Choice Requires="p14">
+      <mc:AlternateContent xmlns:mc="http://schemas.openxmlformats.org/markup-compatibility/2006">
+        <mc:Choice xmlns:p14="http://schemas.microsoft.com/office/powerpoint/2010/main" Requires="p14">
           <p:contentPart p14:bwMode="auto" r:id="rId20">
             <p14:nvContentPartPr>
               <p14:cNvPr id="15" name="Ink 14">
@@ -9072,12 +9122,12 @@
               <p14:nvPr/>
             </p14:nvContentPartPr>
             <p14:xfrm>
-              <a:off x="6014664" y="3185856"/>
+              <a:off x="7441128" y="4036248"/>
               <a:ext cx="317520" cy="651240"/>
             </p14:xfrm>
           </p:contentPart>
         </mc:Choice>
-        <mc:Fallback xmlns="">
+        <mc:Fallback>
           <p:pic>
             <p:nvPicPr>
               <p:cNvPr id="15" name="Ink 14">
@@ -9098,7 +9148,7 @@
             </p:blipFill>
             <p:spPr>
               <a:xfrm>
-                <a:off x="5978664" y="3150216"/>
+                <a:off x="7405128" y="4000248"/>
                 <a:ext cx="389160" cy="722880"/>
               </a:xfrm>
               <a:prstGeom prst="rect">
@@ -9122,7 +9172,7 @@
         </p:nvGrpSpPr>
         <p:grpSpPr>
           <a:xfrm>
-            <a:off x="6681744" y="3267576"/>
+            <a:off x="8108208" y="4117968"/>
             <a:ext cx="1313640" cy="379440"/>
             <a:chOff x="6681744" y="3267576"/>
             <a:chExt cx="1313640" cy="379440"/>
